--- a/courses/learn_partitioning/module01-03-initial-bipartition/slides.pptx
+++ b/courses/learn_partitioning/module01-03-initial-bipartition/slides.pptx
@@ -16,6 +16,9 @@
     <p:sldId id="264" r:id="rId16"/>
     <p:sldId id="265" r:id="rId17"/>
     <p:sldId id="266" r:id="rId18"/>
+    <p:sldId id="267" r:id="rId19"/>
+    <p:sldId id="268" r:id="rId20"/>
+    <p:sldId id="269" r:id="rId21"/>
   </p:sldIdLst>
   <p:sldSz cx="12191695" cy="6858000" type="screen4x3"/>
   <p:notesSz cx="6858000" cy="9144000"/>
@@ -582,7 +585,7 @@
           <a:lstStyle/>
           <a:p>
             <a:r>
-              <a:t>Common traps: optimizing cut while ignoring balance; reporting pairwise cut when the instance is a hypergraph; flipping locked terminals; and stopping before rollback to the best KL or FM prefix. For multilevel flows, verify coarsening before you blame the refiner.</a:t>
+              <a:t>In the browser lab track, open the **initial-bipartition** lab from the tools shelf. Load the starter graph, run the algorithm once, and read cutsize and balance in the metrics panel. Work the challenges that lock the goldens, then come back to implement the same loop yourself.</a:t>
             </a:r>
           </a:p>
         </p:txBody>
@@ -652,6 +655,146 @@
           <a:lstStyle/>
           <a:p>
             <a:r>
+              <a:t>In the implement track, open this module's EXAMPLES.md Pseudocode section and the course common solvers. Parse the tiny graph, run the algorithm with a deterministic seed, and print the assignment plus cutsize and balance. Match the browser goldens before you claim the checklist.</a:t>
+            </a:r>
+          </a:p>
+        </p:txBody>
+      </p:sp>
+      <p:sp>
+        <p:nvSpPr>
+          <p:cNvPr id="4" name="Slide Number Placeholder 3"/>
+          <p:cNvSpPr>
+            <a:spLocks noGrp="1"/>
+          </p:cNvSpPr>
+          <p:nvPr>
+            <p:ph type="sldNum" idx="5" sz="quarter"/>
+          </p:nvPr>
+        </p:nvSpPr>
+        <p:spPr/>
+      </p:sp>
+    </p:spTree>
+  </p:cSld>
+  <p:clrMapOvr>
+    <a:masterClrMapping/>
+  </p:clrMapOvr>
+</p:notes>
+</file>
+
+<file path=ppt/notesSlides/notesSlide12.xml><?xml version="1.0" encoding="utf-8"?>
+<p:notes xmlns:a="http://schemas.openxmlformats.org/drawingml/2006/main" xmlns:p="http://schemas.openxmlformats.org/presentationml/2006/main" xmlns:r="http://schemas.openxmlformats.org/officeDocument/2006/relationships">
+  <p:cSld>
+    <p:spTree>
+      <p:nvGrpSpPr>
+        <p:cNvPr id="1" name=""/>
+        <p:cNvGrpSpPr/>
+        <p:nvPr/>
+      </p:nvGrpSpPr>
+      <p:grpSpPr>
+        <a:xfrm>
+          <a:off x="0" y="0"/>
+          <a:ext cx="0" cy="0"/>
+          <a:chOff x="0" y="0"/>
+          <a:chExt cx="0" cy="0"/>
+        </a:xfrm>
+      </p:grpSpPr>
+      <p:sp>
+        <p:nvSpPr>
+          <p:cNvPr id="2" name="Slide Image Placeholder 1"/>
+          <p:cNvSpPr>
+            <a:spLocks noGrp="1"/>
+          </p:cNvSpPr>
+          <p:nvPr>
+            <p:ph type="sldImg" idx="2"/>
+          </p:nvPr>
+        </p:nvSpPr>
+        <p:spPr/>
+      </p:sp>
+      <p:sp>
+        <p:nvSpPr>
+          <p:cNvPr id="3" name="Notes Placeholder 2"/>
+          <p:cNvSpPr>
+            <a:spLocks noGrp="1"/>
+          </p:cNvSpPr>
+          <p:nvPr>
+            <p:ph type="body" idx="3" sz="quarter"/>
+          </p:nvPr>
+        </p:nvSpPr>
+        <p:spPr/>
+        <p:txBody>
+          <a:bodyPr/>
+          <a:lstStyle/>
+          <a:p>
+            <a:r>
+              <a:t>Common traps: optimizing cut while ignoring balance; reporting pairwise cut when the instance is a hypergraph; flipping locked terminals; and stopping before rollback to the best KL or FM prefix. For multilevel flows, verify coarsening before you blame the refiner.</a:t>
+            </a:r>
+          </a:p>
+        </p:txBody>
+      </p:sp>
+      <p:sp>
+        <p:nvSpPr>
+          <p:cNvPr id="4" name="Slide Number Placeholder 3"/>
+          <p:cNvSpPr>
+            <a:spLocks noGrp="1"/>
+          </p:cNvSpPr>
+          <p:nvPr>
+            <p:ph type="sldNum" idx="5" sz="quarter"/>
+          </p:nvPr>
+        </p:nvSpPr>
+        <p:spPr/>
+      </p:sp>
+    </p:spTree>
+  </p:cSld>
+  <p:clrMapOvr>
+    <a:masterClrMapping/>
+  </p:clrMapOvr>
+</p:notes>
+</file>
+
+<file path=ppt/notesSlides/notesSlide13.xml><?xml version="1.0" encoding="utf-8"?>
+<p:notes xmlns:a="http://schemas.openxmlformats.org/drawingml/2006/main" xmlns:p="http://schemas.openxmlformats.org/presentationml/2006/main" xmlns:r="http://schemas.openxmlformats.org/officeDocument/2006/relationships">
+  <p:cSld>
+    <p:spTree>
+      <p:nvGrpSpPr>
+        <p:cNvPr id="1" name=""/>
+        <p:cNvGrpSpPr/>
+        <p:nvPr/>
+      </p:nvGrpSpPr>
+      <p:grpSpPr>
+        <a:xfrm>
+          <a:off x="0" y="0"/>
+          <a:ext cx="0" cy="0"/>
+          <a:chOff x="0" y="0"/>
+          <a:chExt cx="0" cy="0"/>
+        </a:xfrm>
+      </p:grpSpPr>
+      <p:sp>
+        <p:nvSpPr>
+          <p:cNvPr id="2" name="Slide Image Placeholder 1"/>
+          <p:cNvSpPr>
+            <a:spLocks noGrp="1"/>
+          </p:cNvSpPr>
+          <p:nvPr>
+            <p:ph type="sldImg" idx="2"/>
+          </p:nvPr>
+        </p:nvSpPr>
+        <p:spPr/>
+      </p:sp>
+      <p:sp>
+        <p:nvSpPr>
+          <p:cNvPr id="3" name="Notes Placeholder 2"/>
+          <p:cNvSpPr>
+            <a:spLocks noGrp="1"/>
+          </p:cNvSpPr>
+          <p:nvPr>
+            <p:ph type="body" idx="3" sz="quarter"/>
+          </p:nvPr>
+        </p:nvSpPr>
+        <p:spPr/>
+        <p:txBody>
+          <a:bodyPr/>
+          <a:lstStyle/>
+          <a:p>
+            <a:r>
               <a:t>Complete the checklist for at least one track—preferably both. Implement until your metrics match the starter goldens. When you’re ready, take the short quiz, then continue to the next module.</a:t>
             </a:r>
           </a:p>
@@ -725,12 +868,6 @@
               <a:t>Random shuffles then splits by half. Greedy prefers keeping heavy edges internal when it can. Grow expands a frontier from a seed until the part hits its size budget. All three must report cutsize and balance so you can compare seeds fairly.</a:t>
             </a:r>
           </a:p>
-          <a:p/>
-          <a:p>
-            <a:r>
-              <a:t>&lt;!-- algorithm-walkthrough --&gt;</a:t>
-            </a:r>
-          </a:p>
         </p:txBody>
       </p:sp>
       <p:sp>
@@ -798,7 +935,13 @@
           <a:lstStyle/>
           <a:p>
             <a:r>
-              <a:t>Refinement (KL/FM) needs a bipartition seed. Common builders: random, greedy heaviest-edge, or grow-from-node BFS. All must end with exactly two sides.</a:t>
+              <a:t>Initial bipartition is three named constructors in pseudocode: random split, greedy heavy-edge keep, and grow from a seed until the size budget.</a:t>
+            </a:r>
+          </a:p>
+          <a:p/>
+          <a:p>
+            <a:r>
+              <a:t>Open this module's examples file and find the Pseudocode section. That written sketch is what you implement on the implement track and what the browser challenges measure.</a:t>
             </a:r>
           </a:p>
         </p:txBody>
@@ -868,7 +1011,7 @@
           <a:lstStyle/>
           <a:p>
             <a:r>
-              <a:t>Random (seed=1) lands on ABC|DE with cutsize 3 — the golden communities by luck. Random seeds can also be terrible (seed=4 → cut 13).</a:t>
+              <a:t>Grow from D yields DE versus ABC at cut three. Random seed seven recovers the bad AE versus BCD cut of twelve. Always print cutsize and balance before KL or FM.</a:t>
             </a:r>
           </a:p>
         </p:txBody>
@@ -938,7 +1081,7 @@
           <a:lstStyle/>
           <a:p>
             <a:r>
-              <a:t>Greedy anchors heaviest edge A–B on side 0, then places remaining nodes to minimize added cut. Result AB|CDE has cutsize 5 — legal but worse than grow.</a:t>
+              <a:t>Refinement (KL/FM) needs a bipartition seed. Common builders: random, greedy heaviest-edge, or grow-from-node BFS. All must end with exactly two sides.</a:t>
             </a:r>
           </a:p>
         </p:txBody>
@@ -1008,7 +1151,7 @@
           <a:lstStyle/>
           <a:p>
             <a:r>
-              <a:t>Grow from D pulls E first (w=5), then A and B via heavy edges. Side 0 = {D,E}, side 1 = {A,B,C} — cutsize 3, matching golden.</a:t>
+              <a:t>Random (seed=1) lands on ABC|DE with cutsize 3 — the golden communities by luck. Random seeds can also be terrible (seed=4 → cut 13).</a:t>
             </a:r>
           </a:p>
         </p:txBody>
@@ -1078,13 +1221,7 @@
           <a:lstStyle/>
           <a:p>
             <a:r>
-              <a:t>All three methods produce legal bipartitions, but cutsize ranges 3–13 on the same graph. Better seeds mean less work for KL/FM downstream.</a:t>
-            </a:r>
-          </a:p>
-          <a:p/>
-          <a:p>
-            <a:r>
-              <a:t>&lt;!-- /algorithm-walkthrough --&gt;</a:t>
+              <a:t>Greedy anchors heaviest edge A–B on side 0, then places remaining nodes to minimize added cut. Result AB|CDE has cutsize 5 — legal but worse than grow.</a:t>
             </a:r>
           </a:p>
         </p:txBody>
@@ -1154,7 +1291,7 @@
           <a:lstStyle/>
           <a:p>
             <a:r>
-              <a:t>In the browser lab track, open the **initial-bipartition** lab from the tools shelf. Load the starter graph, run the algorithm once, and read cutsize and balance in the metrics panel. Work the challenges that lock the goldens, then come back to implement the same loop yourself.</a:t>
+              <a:t>Grow from D pulls E first (w=5), then A and B via heavy edges. Side 0 = {D,E}, side 1 = {A,B,C} — cutsize 3, matching golden.</a:t>
             </a:r>
           </a:p>
         </p:txBody>
@@ -1224,7 +1361,7 @@
           <a:lstStyle/>
           <a:p>
             <a:r>
-              <a:t>In the implement track, open this module’s examples and the course `common/` solvers. Parse the tiny graph, run the algorithm with a deterministic seed, and print the assignment plus cutsize and balance. Match the browser goldens before you claim the checklist.</a:t>
+              <a:t>All three methods produce legal bipartitions, but cutsize ranges 3–13 on the same graph. Better seeds mean less work for KL/FM downstream.</a:t>
             </a:r>
           </a:p>
         </p:txBody>
@@ -4382,21 +4519,45 @@
                 </a:solidFill>
                 <a:latin typeface="Calibri"/>
               </a:rPr>
-              <a:t>Pitfalls</a:t>
-            </a:r>
-          </a:p>
-        </p:txBody>
-      </p:sp>
-      <p:sp>
-        <p:nvSpPr>
-          <p:cNvPr id="3" name="TextBox 2"/>
+              <a:t>Seed quality sets the ceiling</a:t>
+            </a:r>
+          </a:p>
+        </p:txBody>
+      </p:sp>
+      <p:pic>
+        <p:nvPicPr>
+          <p:cNvPr id="3" name="Picture 2" descr="05-takeaway.png"/>
+          <p:cNvPicPr>
+            <a:picLocks noChangeAspect="1"/>
+          </p:cNvPicPr>
+          <p:nvPr/>
+        </p:nvPicPr>
+        <p:blipFill>
+          <a:blip r:embed="rId2"/>
+          <a:stretch>
+            <a:fillRect/>
+          </a:stretch>
+        </p:blipFill>
+        <p:spPr>
+          <a:xfrm>
+            <a:off x="548640" y="1143000"/>
+            <a:ext cx="9404113" cy="4572000"/>
+          </a:xfrm>
+          <a:prstGeom prst="rect">
+            <a:avLst/>
+          </a:prstGeom>
+        </p:spPr>
+      </p:pic>
+      <p:sp>
+        <p:nvSpPr>
+          <p:cNvPr id="4" name="TextBox 3"/>
           <p:cNvSpPr txBox="1"/>
           <p:nvPr/>
         </p:nvSpPr>
         <p:spPr>
           <a:xfrm>
-            <a:off x="548640" y="1234440"/>
-            <a:ext cx="11064240" cy="4937760"/>
+            <a:off x="548640" y="5897880"/>
+            <a:ext cx="11064240" cy="411480"/>
           </a:xfrm>
           <a:prstGeom prst="rect">
             <a:avLst/>
@@ -4409,54 +4570,26 @@
           </a:bodyPr>
           <a:lstStyle/>
           <a:p>
-            <a:pPr lvl="0" marL="457200" indent="-228600">
-              <a:buFont typeface="Calibri"/>
-              <a:spcAft>
-                <a:spcPts val="1000"/>
-              </a:spcAft>
-              <a:buSzPct val="100000"/>
-              <a:buChar char="•"/>
+            <a:pPr>
               <a:lnSpc>
                 <a:spcPts val="2200"/>
               </a:lnSpc>
             </a:pPr>
             <a:r>
-              <a:rPr sz="2000" b="0">
+              <a:rPr sz="1200" b="0">
                 <a:solidFill>
                   <a:srgbClr val="333333"/>
                 </a:solidFill>
                 <a:latin typeface="Calibri"/>
               </a:rPr>
-              <a:t>Common traps</a:t>
-            </a:r>
-          </a:p>
-          <a:p>
-            <a:pPr lvl="0" marL="457200" indent="-228600">
-              <a:buFont typeface="Calibri"/>
-              <a:spcAft>
-                <a:spcPts val="1000"/>
-              </a:spcAft>
-              <a:buSzPct val="100000"/>
-              <a:buChar char="•"/>
-              <a:lnSpc>
-                <a:spcPts val="2200"/>
-              </a:lnSpc>
-            </a:pPr>
-            <a:r>
-              <a:rPr sz="2000" b="0">
-                <a:solidFill>
-                  <a:srgbClr val="333333"/>
-                </a:solidFill>
-                <a:latin typeface="Calibri"/>
-              </a:rPr>
-              <a:t>For multilevel flows, verify coarsening before you blame the refiner</a:t>
-            </a:r>
-          </a:p>
-        </p:txBody>
-      </p:sp>
-      <p:sp>
-        <p:nvSpPr>
-          <p:cNvPr id="4" name="TextBox 3"/>
+              <a:t>Seed quality sets the ceiling</a:t>
+            </a:r>
+          </a:p>
+        </p:txBody>
+      </p:sp>
+      <p:sp>
+        <p:nvSpPr>
+          <p:cNvPr id="5" name="TextBox 4"/>
           <p:cNvSpPr txBox="1"/>
           <p:nvPr/>
         </p:nvSpPr>
@@ -4545,6 +4678,557 @@
                 </a:solidFill>
                 <a:latin typeface="Calibri"/>
               </a:rPr>
+              <a:t>Browser lab track</a:t>
+            </a:r>
+          </a:p>
+        </p:txBody>
+      </p:sp>
+      <p:sp>
+        <p:nvSpPr>
+          <p:cNvPr id="3" name="TextBox 2"/>
+          <p:cNvSpPr txBox="1"/>
+          <p:nvPr/>
+        </p:nvSpPr>
+        <p:spPr>
+          <a:xfrm>
+            <a:off x="548640" y="1234440"/>
+            <a:ext cx="11064240" cy="4937760"/>
+          </a:xfrm>
+          <a:prstGeom prst="rect">
+            <a:avLst/>
+          </a:prstGeom>
+          <a:noFill/>
+        </p:spPr>
+        <p:txBody>
+          <a:bodyPr wrap="square">
+            <a:noAutofit/>
+          </a:bodyPr>
+          <a:lstStyle/>
+          <a:p>
+            <a:pPr lvl="0" marL="457200" indent="-228600">
+              <a:buFont typeface="Calibri"/>
+              <a:spcAft>
+                <a:spcPts val="1000"/>
+              </a:spcAft>
+              <a:buSzPct val="100000"/>
+              <a:buChar char="•"/>
+              <a:lnSpc>
+                <a:spcPts val="2200"/>
+              </a:lnSpc>
+            </a:pPr>
+            <a:r>
+              <a:rPr sz="2000" b="0">
+                <a:solidFill>
+                  <a:srgbClr val="333333"/>
+                </a:solidFill>
+                <a:latin typeface="Calibri"/>
+              </a:rPr>
+              <a:t>In the browser lab track, open the </a:t>
+            </a:r>
+            <a:r>
+              <a:rPr sz="2000" b="1">
+                <a:solidFill>
+                  <a:srgbClr val="333333"/>
+                </a:solidFill>
+                <a:latin typeface="Calibri"/>
+              </a:rPr>
+              <a:t>initial-bipartition</a:t>
+            </a:r>
+            <a:r>
+              <a:rPr sz="2000" b="0">
+                <a:solidFill>
+                  <a:srgbClr val="333333"/>
+                </a:solidFill>
+                <a:latin typeface="Calibri"/>
+              </a:rPr>
+              <a:t> lab from the tools shelf</a:t>
+            </a:r>
+          </a:p>
+          <a:p>
+            <a:pPr lvl="0" marL="457200" indent="-228600">
+              <a:buFont typeface="Calibri"/>
+              <a:spcAft>
+                <a:spcPts val="1000"/>
+              </a:spcAft>
+              <a:buSzPct val="100000"/>
+              <a:buChar char="•"/>
+              <a:lnSpc>
+                <a:spcPts val="2200"/>
+              </a:lnSpc>
+            </a:pPr>
+            <a:r>
+              <a:rPr sz="2000" b="0">
+                <a:solidFill>
+                  <a:srgbClr val="333333"/>
+                </a:solidFill>
+                <a:latin typeface="Calibri"/>
+              </a:rPr>
+              <a:t>Load the starter graph, run the algorithm once</a:t>
+            </a:r>
+          </a:p>
+          <a:p>
+            <a:pPr lvl="0" marL="457200" indent="-228600">
+              <a:buFont typeface="Calibri"/>
+              <a:spcAft>
+                <a:spcPts val="1000"/>
+              </a:spcAft>
+              <a:buSzPct val="100000"/>
+              <a:buChar char="•"/>
+              <a:lnSpc>
+                <a:spcPts val="2200"/>
+              </a:lnSpc>
+            </a:pPr>
+            <a:r>
+              <a:rPr sz="2000" b="0">
+                <a:solidFill>
+                  <a:srgbClr val="333333"/>
+                </a:solidFill>
+                <a:latin typeface="Calibri"/>
+              </a:rPr>
+              <a:t>Work the challenges that lock the goldens</a:t>
+            </a:r>
+          </a:p>
+        </p:txBody>
+      </p:sp>
+      <p:sp>
+        <p:nvSpPr>
+          <p:cNvPr id="4" name="TextBox 3"/>
+          <p:cNvSpPr txBox="1"/>
+          <p:nvPr/>
+        </p:nvSpPr>
+        <p:spPr>
+          <a:xfrm>
+            <a:off x="548640" y="6355080"/>
+            <a:ext cx="11064240" cy="320040"/>
+          </a:xfrm>
+          <a:prstGeom prst="rect">
+            <a:avLst/>
+          </a:prstGeom>
+          <a:noFill/>
+        </p:spPr>
+        <p:txBody>
+          <a:bodyPr wrap="square">
+            <a:noAutofit/>
+          </a:bodyPr>
+          <a:lstStyle/>
+          <a:p>
+            <a:pPr algn="r">
+              <a:lnSpc>
+                <a:spcPts val="2200"/>
+              </a:lnSpc>
+              <a:defRPr sz="1000" b="0">
+                <a:solidFill>
+                  <a:srgbClr val="666666"/>
+                </a:solidFill>
+                <a:latin typeface="Calibri"/>
+              </a:defRPr>
+            </a:pPr>
+            <a:r>
+              <a:t>learn_partitioning — 03 initial bipartition</a:t>
+            </a:r>
+          </a:p>
+        </p:txBody>
+      </p:sp>
+    </p:spTree>
+  </p:cSld>
+  <p:clrMapOvr>
+    <a:masterClrMapping/>
+  </p:clrMapOvr>
+</p:sld>
+</file>
+
+<file path=ppt/slides/slide12.xml><?xml version="1.0" encoding="utf-8"?>
+<p:sld xmlns:a="http://schemas.openxmlformats.org/drawingml/2006/main" xmlns:p="http://schemas.openxmlformats.org/presentationml/2006/main" xmlns:r="http://schemas.openxmlformats.org/officeDocument/2006/relationships">
+  <p:cSld>
+    <p:spTree>
+      <p:nvGrpSpPr>
+        <p:cNvPr id="1" name=""/>
+        <p:cNvGrpSpPr/>
+        <p:nvPr/>
+      </p:nvGrpSpPr>
+      <p:grpSpPr/>
+      <p:sp>
+        <p:nvSpPr>
+          <p:cNvPr id="2" name="TextBox 1"/>
+          <p:cNvSpPr txBox="1"/>
+          <p:nvPr/>
+        </p:nvSpPr>
+        <p:spPr>
+          <a:xfrm>
+            <a:off x="548640" y="411480"/>
+            <a:ext cx="11064240" cy="777240"/>
+          </a:xfrm>
+          <a:prstGeom prst="rect">
+            <a:avLst/>
+          </a:prstGeom>
+          <a:noFill/>
+        </p:spPr>
+        <p:txBody>
+          <a:bodyPr wrap="square">
+            <a:noAutofit/>
+          </a:bodyPr>
+          <a:lstStyle/>
+          <a:p>
+            <a:pPr>
+              <a:lnSpc>
+                <a:spcPts val="2200"/>
+              </a:lnSpc>
+            </a:pPr>
+            <a:r>
+              <a:rPr sz="2800" b="1">
+                <a:solidFill>
+                  <a:srgbClr val="1A1A2E"/>
+                </a:solidFill>
+                <a:latin typeface="Calibri"/>
+              </a:rPr>
+              <a:t>Implement track</a:t>
+            </a:r>
+          </a:p>
+        </p:txBody>
+      </p:sp>
+      <p:sp>
+        <p:nvSpPr>
+          <p:cNvPr id="3" name="TextBox 2"/>
+          <p:cNvSpPr txBox="1"/>
+          <p:nvPr/>
+        </p:nvSpPr>
+        <p:spPr>
+          <a:xfrm>
+            <a:off x="548640" y="1234440"/>
+            <a:ext cx="11064240" cy="4937760"/>
+          </a:xfrm>
+          <a:prstGeom prst="rect">
+            <a:avLst/>
+          </a:prstGeom>
+          <a:noFill/>
+        </p:spPr>
+        <p:txBody>
+          <a:bodyPr wrap="square">
+            <a:noAutofit/>
+          </a:bodyPr>
+          <a:lstStyle/>
+          <a:p>
+            <a:pPr lvl="0" marL="457200" indent="-228600">
+              <a:buFont typeface="Calibri"/>
+              <a:spcAft>
+                <a:spcPts val="1000"/>
+              </a:spcAft>
+              <a:buSzPct val="100000"/>
+              <a:buChar char="•"/>
+              <a:lnSpc>
+                <a:spcPts val="2200"/>
+              </a:lnSpc>
+            </a:pPr>
+            <a:r>
+              <a:rPr sz="2000" b="0">
+                <a:solidFill>
+                  <a:srgbClr val="333333"/>
+                </a:solidFill>
+                <a:latin typeface="Calibri"/>
+              </a:rPr>
+              <a:t>In the implement track</a:t>
+            </a:r>
+          </a:p>
+          <a:p>
+            <a:pPr lvl="0" marL="457200" indent="-228600">
+              <a:buFont typeface="Calibri"/>
+              <a:spcAft>
+                <a:spcPts val="1000"/>
+              </a:spcAft>
+              <a:buSzPct val="100000"/>
+              <a:buChar char="•"/>
+              <a:lnSpc>
+                <a:spcPts val="2200"/>
+              </a:lnSpc>
+            </a:pPr>
+            <a:r>
+              <a:rPr sz="2000" b="0">
+                <a:solidFill>
+                  <a:srgbClr val="333333"/>
+                </a:solidFill>
+                <a:latin typeface="Calibri"/>
+              </a:rPr>
+              <a:t>Parse the tiny graph, run the algorithm with a deterministic seed</a:t>
+            </a:r>
+          </a:p>
+          <a:p>
+            <a:pPr lvl="0" marL="457200" indent="-228600">
+              <a:buFont typeface="Calibri"/>
+              <a:spcAft>
+                <a:spcPts val="1000"/>
+              </a:spcAft>
+              <a:buSzPct val="100000"/>
+              <a:buChar char="•"/>
+              <a:lnSpc>
+                <a:spcPts val="2200"/>
+              </a:lnSpc>
+            </a:pPr>
+            <a:r>
+              <a:rPr sz="2000" b="0">
+                <a:solidFill>
+                  <a:srgbClr val="333333"/>
+                </a:solidFill>
+                <a:latin typeface="Calibri"/>
+              </a:rPr>
+              <a:t>Match the browser goldens before you claim the checklist</a:t>
+            </a:r>
+          </a:p>
+        </p:txBody>
+      </p:sp>
+      <p:sp>
+        <p:nvSpPr>
+          <p:cNvPr id="4" name="TextBox 3"/>
+          <p:cNvSpPr txBox="1"/>
+          <p:nvPr/>
+        </p:nvSpPr>
+        <p:spPr>
+          <a:xfrm>
+            <a:off x="548640" y="6355080"/>
+            <a:ext cx="11064240" cy="320040"/>
+          </a:xfrm>
+          <a:prstGeom prst="rect">
+            <a:avLst/>
+          </a:prstGeom>
+          <a:noFill/>
+        </p:spPr>
+        <p:txBody>
+          <a:bodyPr wrap="square">
+            <a:noAutofit/>
+          </a:bodyPr>
+          <a:lstStyle/>
+          <a:p>
+            <a:pPr algn="r">
+              <a:lnSpc>
+                <a:spcPts val="2200"/>
+              </a:lnSpc>
+              <a:defRPr sz="1000" b="0">
+                <a:solidFill>
+                  <a:srgbClr val="666666"/>
+                </a:solidFill>
+                <a:latin typeface="Calibri"/>
+              </a:defRPr>
+            </a:pPr>
+            <a:r>
+              <a:t>learn_partitioning — 03 initial bipartition</a:t>
+            </a:r>
+          </a:p>
+        </p:txBody>
+      </p:sp>
+    </p:spTree>
+  </p:cSld>
+  <p:clrMapOvr>
+    <a:masterClrMapping/>
+  </p:clrMapOvr>
+</p:sld>
+</file>
+
+<file path=ppt/slides/slide13.xml><?xml version="1.0" encoding="utf-8"?>
+<p:sld xmlns:a="http://schemas.openxmlformats.org/drawingml/2006/main" xmlns:p="http://schemas.openxmlformats.org/presentationml/2006/main" xmlns:r="http://schemas.openxmlformats.org/officeDocument/2006/relationships">
+  <p:cSld>
+    <p:spTree>
+      <p:nvGrpSpPr>
+        <p:cNvPr id="1" name=""/>
+        <p:cNvGrpSpPr/>
+        <p:nvPr/>
+      </p:nvGrpSpPr>
+      <p:grpSpPr/>
+      <p:sp>
+        <p:nvSpPr>
+          <p:cNvPr id="2" name="TextBox 1"/>
+          <p:cNvSpPr txBox="1"/>
+          <p:nvPr/>
+        </p:nvSpPr>
+        <p:spPr>
+          <a:xfrm>
+            <a:off x="548640" y="411480"/>
+            <a:ext cx="11064240" cy="777240"/>
+          </a:xfrm>
+          <a:prstGeom prst="rect">
+            <a:avLst/>
+          </a:prstGeom>
+          <a:noFill/>
+        </p:spPr>
+        <p:txBody>
+          <a:bodyPr wrap="square">
+            <a:noAutofit/>
+          </a:bodyPr>
+          <a:lstStyle/>
+          <a:p>
+            <a:pPr>
+              <a:lnSpc>
+                <a:spcPts val="2200"/>
+              </a:lnSpc>
+            </a:pPr>
+            <a:r>
+              <a:rPr sz="2800" b="1">
+                <a:solidFill>
+                  <a:srgbClr val="1A1A2E"/>
+                </a:solidFill>
+                <a:latin typeface="Calibri"/>
+              </a:rPr>
+              <a:t>Pitfalls</a:t>
+            </a:r>
+          </a:p>
+        </p:txBody>
+      </p:sp>
+      <p:sp>
+        <p:nvSpPr>
+          <p:cNvPr id="3" name="TextBox 2"/>
+          <p:cNvSpPr txBox="1"/>
+          <p:nvPr/>
+        </p:nvSpPr>
+        <p:spPr>
+          <a:xfrm>
+            <a:off x="548640" y="1234440"/>
+            <a:ext cx="11064240" cy="4937760"/>
+          </a:xfrm>
+          <a:prstGeom prst="rect">
+            <a:avLst/>
+          </a:prstGeom>
+          <a:noFill/>
+        </p:spPr>
+        <p:txBody>
+          <a:bodyPr wrap="square">
+            <a:noAutofit/>
+          </a:bodyPr>
+          <a:lstStyle/>
+          <a:p>
+            <a:pPr lvl="0" marL="457200" indent="-228600">
+              <a:buFont typeface="Calibri"/>
+              <a:spcAft>
+                <a:spcPts val="1000"/>
+              </a:spcAft>
+              <a:buSzPct val="100000"/>
+              <a:buChar char="•"/>
+              <a:lnSpc>
+                <a:spcPts val="2200"/>
+              </a:lnSpc>
+            </a:pPr>
+            <a:r>
+              <a:rPr sz="2000" b="0">
+                <a:solidFill>
+                  <a:srgbClr val="333333"/>
+                </a:solidFill>
+                <a:latin typeface="Calibri"/>
+              </a:rPr>
+              <a:t>Common traps</a:t>
+            </a:r>
+          </a:p>
+          <a:p>
+            <a:pPr lvl="0" marL="457200" indent="-228600">
+              <a:buFont typeface="Calibri"/>
+              <a:spcAft>
+                <a:spcPts val="1000"/>
+              </a:spcAft>
+              <a:buSzPct val="100000"/>
+              <a:buChar char="•"/>
+              <a:lnSpc>
+                <a:spcPts val="2200"/>
+              </a:lnSpc>
+            </a:pPr>
+            <a:r>
+              <a:rPr sz="2000" b="0">
+                <a:solidFill>
+                  <a:srgbClr val="333333"/>
+                </a:solidFill>
+                <a:latin typeface="Calibri"/>
+              </a:rPr>
+              <a:t>For multilevel flows, verify coarsening before you blame the refiner</a:t>
+            </a:r>
+          </a:p>
+        </p:txBody>
+      </p:sp>
+      <p:sp>
+        <p:nvSpPr>
+          <p:cNvPr id="4" name="TextBox 3"/>
+          <p:cNvSpPr txBox="1"/>
+          <p:nvPr/>
+        </p:nvSpPr>
+        <p:spPr>
+          <a:xfrm>
+            <a:off x="548640" y="6355080"/>
+            <a:ext cx="11064240" cy="320040"/>
+          </a:xfrm>
+          <a:prstGeom prst="rect">
+            <a:avLst/>
+          </a:prstGeom>
+          <a:noFill/>
+        </p:spPr>
+        <p:txBody>
+          <a:bodyPr wrap="square">
+            <a:noAutofit/>
+          </a:bodyPr>
+          <a:lstStyle/>
+          <a:p>
+            <a:pPr algn="r">
+              <a:lnSpc>
+                <a:spcPts val="2200"/>
+              </a:lnSpc>
+              <a:defRPr sz="1000" b="0">
+                <a:solidFill>
+                  <a:srgbClr val="666666"/>
+                </a:solidFill>
+                <a:latin typeface="Calibri"/>
+              </a:defRPr>
+            </a:pPr>
+            <a:r>
+              <a:t>learn_partitioning — 03 initial bipartition</a:t>
+            </a:r>
+          </a:p>
+        </p:txBody>
+      </p:sp>
+    </p:spTree>
+  </p:cSld>
+  <p:clrMapOvr>
+    <a:masterClrMapping/>
+  </p:clrMapOvr>
+</p:sld>
+</file>
+
+<file path=ppt/slides/slide14.xml><?xml version="1.0" encoding="utf-8"?>
+<p:sld xmlns:a="http://schemas.openxmlformats.org/drawingml/2006/main" xmlns:p="http://schemas.openxmlformats.org/presentationml/2006/main" xmlns:r="http://schemas.openxmlformats.org/officeDocument/2006/relationships">
+  <p:cSld>
+    <p:spTree>
+      <p:nvGrpSpPr>
+        <p:cNvPr id="1" name=""/>
+        <p:cNvGrpSpPr/>
+        <p:nvPr/>
+      </p:nvGrpSpPr>
+      <p:grpSpPr/>
+      <p:sp>
+        <p:nvSpPr>
+          <p:cNvPr id="2" name="TextBox 1"/>
+          <p:cNvSpPr txBox="1"/>
+          <p:nvPr/>
+        </p:nvSpPr>
+        <p:spPr>
+          <a:xfrm>
+            <a:off x="548640" y="411480"/>
+            <a:ext cx="11064240" cy="777240"/>
+          </a:xfrm>
+          <a:prstGeom prst="rect">
+            <a:avLst/>
+          </a:prstGeom>
+          <a:noFill/>
+        </p:spPr>
+        <p:txBody>
+          <a:bodyPr wrap="square">
+            <a:noAutofit/>
+          </a:bodyPr>
+          <a:lstStyle/>
+          <a:p>
+            <a:pPr>
+              <a:lnSpc>
+                <a:spcPts val="2200"/>
+              </a:lnSpc>
+            </a:pPr>
+            <a:r>
+              <a:rPr sz="2800" b="1">
+                <a:solidFill>
+                  <a:srgbClr val="1A1A2E"/>
+                </a:solidFill>
+                <a:latin typeface="Calibri"/>
+              </a:rPr>
               <a:t>Your turn</a:t>
             </a:r>
           </a:p>
@@ -4844,6 +5528,125 @@
               <a:t>All three must report cutsize and balance so you can compare seeds fairly</a:t>
             </a:r>
           </a:p>
+        </p:txBody>
+      </p:sp>
+      <p:sp>
+        <p:nvSpPr>
+          <p:cNvPr id="4" name="TextBox 3"/>
+          <p:cNvSpPr txBox="1"/>
+          <p:nvPr/>
+        </p:nvSpPr>
+        <p:spPr>
+          <a:xfrm>
+            <a:off x="548640" y="6355080"/>
+            <a:ext cx="11064240" cy="320040"/>
+          </a:xfrm>
+          <a:prstGeom prst="rect">
+            <a:avLst/>
+          </a:prstGeom>
+          <a:noFill/>
+        </p:spPr>
+        <p:txBody>
+          <a:bodyPr wrap="square">
+            <a:noAutofit/>
+          </a:bodyPr>
+          <a:lstStyle/>
+          <a:p>
+            <a:pPr algn="r">
+              <a:lnSpc>
+                <a:spcPts val="2200"/>
+              </a:lnSpc>
+              <a:defRPr sz="1000" b="0">
+                <a:solidFill>
+                  <a:srgbClr val="666666"/>
+                </a:solidFill>
+                <a:latin typeface="Calibri"/>
+              </a:defRPr>
+            </a:pPr>
+            <a:r>
+              <a:t>learn_partitioning — 03 initial bipartition</a:t>
+            </a:r>
+          </a:p>
+        </p:txBody>
+      </p:sp>
+    </p:spTree>
+  </p:cSld>
+  <p:clrMapOvr>
+    <a:masterClrMapping/>
+  </p:clrMapOvr>
+</p:sld>
+</file>
+
+<file path=ppt/slides/slide3.xml><?xml version="1.0" encoding="utf-8"?>
+<p:sld xmlns:a="http://schemas.openxmlformats.org/drawingml/2006/main" xmlns:p="http://schemas.openxmlformats.org/presentationml/2006/main" xmlns:r="http://schemas.openxmlformats.org/officeDocument/2006/relationships">
+  <p:cSld>
+    <p:spTree>
+      <p:nvGrpSpPr>
+        <p:cNvPr id="1" name=""/>
+        <p:cNvGrpSpPr/>
+        <p:nvPr/>
+      </p:nvGrpSpPr>
+      <p:grpSpPr/>
+      <p:sp>
+        <p:nvSpPr>
+          <p:cNvPr id="2" name="TextBox 1"/>
+          <p:cNvSpPr txBox="1"/>
+          <p:nvPr/>
+        </p:nvSpPr>
+        <p:spPr>
+          <a:xfrm>
+            <a:off x="548640" y="411480"/>
+            <a:ext cx="11064240" cy="777240"/>
+          </a:xfrm>
+          <a:prstGeom prst="rect">
+            <a:avLst/>
+          </a:prstGeom>
+          <a:noFill/>
+        </p:spPr>
+        <p:txBody>
+          <a:bodyPr wrap="square">
+            <a:noAutofit/>
+          </a:bodyPr>
+          <a:lstStyle/>
+          <a:p>
+            <a:pPr>
+              <a:lnSpc>
+                <a:spcPts val="2200"/>
+              </a:lnSpc>
+            </a:pPr>
+            <a:r>
+              <a:rPr sz="2800" b="1">
+                <a:solidFill>
+                  <a:srgbClr val="1A1A2E"/>
+                </a:solidFill>
+                <a:latin typeface="Calibri"/>
+              </a:rPr>
+              <a:t>Pseudocode</a:t>
+            </a:r>
+          </a:p>
+        </p:txBody>
+      </p:sp>
+      <p:sp>
+        <p:nvSpPr>
+          <p:cNvPr id="3" name="TextBox 2"/>
+          <p:cNvSpPr txBox="1"/>
+          <p:nvPr/>
+        </p:nvSpPr>
+        <p:spPr>
+          <a:xfrm>
+            <a:off x="548640" y="1234440"/>
+            <a:ext cx="11064240" cy="4937760"/>
+          </a:xfrm>
+          <a:prstGeom prst="rect">
+            <a:avLst/>
+          </a:prstGeom>
+          <a:noFill/>
+        </p:spPr>
+        <p:txBody>
+          <a:bodyPr wrap="square">
+            <a:noAutofit/>
+          </a:bodyPr>
+          <a:lstStyle/>
           <a:p>
             <a:pPr lvl="0" marL="457200" indent="-228600">
               <a:buFont typeface="Calibri"/>
@@ -4863,7 +5666,51 @@
                 </a:solidFill>
                 <a:latin typeface="Calibri"/>
               </a:rPr>
-              <a:t>&lt;!-- algorithm-walkthrough --&gt;</a:t>
+              <a:t>Initial bipartition is three named constructors in pseudocode</a:t>
+            </a:r>
+          </a:p>
+          <a:p>
+            <a:pPr lvl="0" marL="457200" indent="-228600">
+              <a:buFont typeface="Calibri"/>
+              <a:spcAft>
+                <a:spcPts val="1000"/>
+              </a:spcAft>
+              <a:buSzPct val="100000"/>
+              <a:buChar char="•"/>
+              <a:lnSpc>
+                <a:spcPts val="2200"/>
+              </a:lnSpc>
+            </a:pPr>
+            <a:r>
+              <a:rPr sz="2000" b="0">
+                <a:solidFill>
+                  <a:srgbClr val="333333"/>
+                </a:solidFill>
+                <a:latin typeface="Calibri"/>
+              </a:rPr>
+              <a:t>Open this module's examples file and find the Pseudocode section</a:t>
+            </a:r>
+          </a:p>
+          <a:p>
+            <a:pPr lvl="0" marL="457200" indent="-228600">
+              <a:buFont typeface="Calibri"/>
+              <a:spcAft>
+                <a:spcPts val="1000"/>
+              </a:spcAft>
+              <a:buSzPct val="100000"/>
+              <a:buChar char="•"/>
+              <a:lnSpc>
+                <a:spcPts val="2200"/>
+              </a:lnSpc>
+            </a:pPr>
+            <a:r>
+              <a:rPr sz="2000" b="0">
+                <a:solidFill>
+                  <a:srgbClr val="333333"/>
+                </a:solidFill>
+                <a:latin typeface="Calibri"/>
+              </a:rPr>
+              <a:t>That written sketch is what you implement on the implement track and what the browser</a:t>
             </a:r>
           </a:p>
         </p:txBody>
@@ -4915,7 +5762,465 @@
 </p:sld>
 </file>
 
-<file path=ppt/slides/slide3.xml><?xml version="1.0" encoding="utf-8"?>
+<file path=ppt/slides/slide4.xml><?xml version="1.0" encoding="utf-8"?>
+<p:sld xmlns:a="http://schemas.openxmlformats.org/drawingml/2006/main" xmlns:p="http://schemas.openxmlformats.org/presentationml/2006/main" xmlns:r="http://schemas.openxmlformats.org/officeDocument/2006/relationships">
+  <p:cSld>
+    <p:spTree>
+      <p:nvGrpSpPr>
+        <p:cNvPr id="1" name=""/>
+        <p:cNvGrpSpPr/>
+        <p:nvPr/>
+      </p:nvGrpSpPr>
+      <p:grpSpPr/>
+      <p:sp>
+        <p:nvSpPr>
+          <p:cNvPr id="2" name="TextBox 1"/>
+          <p:cNvSpPr txBox="1"/>
+          <p:nvPr/>
+        </p:nvSpPr>
+        <p:spPr>
+          <a:xfrm>
+            <a:off x="548640" y="411480"/>
+            <a:ext cx="11064240" cy="777240"/>
+          </a:xfrm>
+          <a:prstGeom prst="rect">
+            <a:avLst/>
+          </a:prstGeom>
+          <a:noFill/>
+        </p:spPr>
+        <p:txBody>
+          <a:bodyPr wrap="square">
+            <a:noAutofit/>
+          </a:bodyPr>
+          <a:lstStyle/>
+          <a:p>
+            <a:pPr>
+              <a:lnSpc>
+                <a:spcPts val="2200"/>
+              </a:lnSpc>
+            </a:pPr>
+            <a:r>
+              <a:rPr sz="2800" b="1">
+                <a:solidFill>
+                  <a:srgbClr val="1A1A2E"/>
+                </a:solidFill>
+                <a:latin typeface="Calibri"/>
+              </a:rPr>
+              <a:t>Algorithm sketch</a:t>
+            </a:r>
+          </a:p>
+        </p:txBody>
+      </p:sp>
+      <p:sp>
+        <p:nvSpPr>
+          <p:cNvPr id="3" name="TextBox 2"/>
+          <p:cNvSpPr txBox="1"/>
+          <p:nvPr/>
+        </p:nvSpPr>
+        <p:spPr>
+          <a:xfrm>
+            <a:off x="548640" y="1234440"/>
+            <a:ext cx="11064240" cy="4937760"/>
+          </a:xfrm>
+          <a:prstGeom prst="rect">
+            <a:avLst/>
+          </a:prstGeom>
+          <a:noFill/>
+        </p:spPr>
+        <p:txBody>
+          <a:bodyPr wrap="square">
+            <a:noAutofit/>
+          </a:bodyPr>
+          <a:lstStyle/>
+          <a:p>
+            <a:pPr lvl="0" marL="457200" indent="-228600">
+              <a:buFont typeface="Calibri"/>
+              <a:spcAft>
+                <a:spcPts val="1000"/>
+              </a:spcAft>
+              <a:buSzPct val="100000"/>
+              <a:buChar char="•"/>
+              <a:lnSpc>
+                <a:spcPts val="2200"/>
+              </a:lnSpc>
+            </a:pPr>
+            <a:r>
+              <a:rPr sz="2000" b="0">
+                <a:solidFill>
+                  <a:srgbClr val="333333"/>
+                </a:solidFill>
+                <a:latin typeface="Calibri"/>
+              </a:rPr>
+              <a:t>Grow from D yields DE versus ABC at cut three</a:t>
+            </a:r>
+          </a:p>
+          <a:p>
+            <a:pPr lvl="0" marL="457200" indent="-228600">
+              <a:buFont typeface="Calibri"/>
+              <a:spcAft>
+                <a:spcPts val="1000"/>
+              </a:spcAft>
+              <a:buSzPct val="100000"/>
+              <a:buChar char="•"/>
+              <a:lnSpc>
+                <a:spcPts val="2200"/>
+              </a:lnSpc>
+            </a:pPr>
+            <a:r>
+              <a:rPr sz="2000" b="0">
+                <a:solidFill>
+                  <a:srgbClr val="333333"/>
+                </a:solidFill>
+                <a:latin typeface="Calibri"/>
+              </a:rPr>
+              <a:t>Random seed seven recovers the bad AE versus BCD cut of twelve</a:t>
+            </a:r>
+          </a:p>
+          <a:p>
+            <a:pPr lvl="0" marL="457200" indent="-228600">
+              <a:buFont typeface="Calibri"/>
+              <a:spcAft>
+                <a:spcPts val="1000"/>
+              </a:spcAft>
+              <a:buSzPct val="100000"/>
+              <a:buChar char="•"/>
+              <a:lnSpc>
+                <a:spcPts val="2200"/>
+              </a:lnSpc>
+            </a:pPr>
+            <a:r>
+              <a:rPr sz="2000" b="0">
+                <a:solidFill>
+                  <a:srgbClr val="333333"/>
+                </a:solidFill>
+                <a:latin typeface="Calibri"/>
+              </a:rPr>
+              <a:t>Always print cutsize and balance before KL or FM</a:t>
+            </a:r>
+          </a:p>
+        </p:txBody>
+      </p:sp>
+      <p:sp>
+        <p:nvSpPr>
+          <p:cNvPr id="4" name="TextBox 3"/>
+          <p:cNvSpPr txBox="1"/>
+          <p:nvPr/>
+        </p:nvSpPr>
+        <p:spPr>
+          <a:xfrm>
+            <a:off x="548640" y="6355080"/>
+            <a:ext cx="11064240" cy="320040"/>
+          </a:xfrm>
+          <a:prstGeom prst="rect">
+            <a:avLst/>
+          </a:prstGeom>
+          <a:noFill/>
+        </p:spPr>
+        <p:txBody>
+          <a:bodyPr wrap="square">
+            <a:noAutofit/>
+          </a:bodyPr>
+          <a:lstStyle/>
+          <a:p>
+            <a:pPr algn="r">
+              <a:lnSpc>
+                <a:spcPts val="2200"/>
+              </a:lnSpc>
+              <a:defRPr sz="1000" b="0">
+                <a:solidFill>
+                  <a:srgbClr val="666666"/>
+                </a:solidFill>
+                <a:latin typeface="Calibri"/>
+              </a:defRPr>
+            </a:pPr>
+            <a:r>
+              <a:t>learn_partitioning — 03 initial bipartition</a:t>
+            </a:r>
+          </a:p>
+        </p:txBody>
+      </p:sp>
+    </p:spTree>
+  </p:cSld>
+  <p:clrMapOvr>
+    <a:masterClrMapping/>
+  </p:clrMapOvr>
+</p:sld>
+</file>
+
+<file path=ppt/slides/slide5.xml><?xml version="1.0" encoding="utf-8"?>
+<p:sld xmlns:a="http://schemas.openxmlformats.org/drawingml/2006/main" xmlns:p="http://schemas.openxmlformats.org/presentationml/2006/main" xmlns:r="http://schemas.openxmlformats.org/officeDocument/2006/relationships">
+  <p:cSld>
+    <p:spTree>
+      <p:nvGrpSpPr>
+        <p:cNvPr id="1" name=""/>
+        <p:cNvGrpSpPr/>
+        <p:nvPr/>
+      </p:nvGrpSpPr>
+      <p:grpSpPr/>
+      <p:sp>
+        <p:nvSpPr>
+          <p:cNvPr id="2" name="TextBox 1"/>
+          <p:cNvSpPr txBox="1"/>
+          <p:nvPr/>
+        </p:nvSpPr>
+        <p:spPr>
+          <a:xfrm>
+            <a:off x="548640" y="411480"/>
+            <a:ext cx="11064240" cy="777240"/>
+          </a:xfrm>
+          <a:prstGeom prst="rect">
+            <a:avLst/>
+          </a:prstGeom>
+          <a:noFill/>
+        </p:spPr>
+        <p:txBody>
+          <a:bodyPr wrap="square">
+            <a:noAutofit/>
+          </a:bodyPr>
+          <a:lstStyle/>
+          <a:p>
+            <a:pPr>
+              <a:lnSpc>
+                <a:spcPts val="2200"/>
+              </a:lnSpc>
+            </a:pPr>
+            <a:r>
+              <a:rPr sz="2800" b="1">
+                <a:solidFill>
+                  <a:srgbClr val="1A1A2E"/>
+                </a:solidFill>
+                <a:latin typeface="Calibri"/>
+              </a:rPr>
+              <a:t>Algorithm sketch — try these</a:t>
+            </a:r>
+          </a:p>
+        </p:txBody>
+      </p:sp>
+      <p:sp>
+        <p:nvSpPr>
+          <p:cNvPr id="3" name="TextBox 2"/>
+          <p:cNvSpPr txBox="1"/>
+          <p:nvPr/>
+        </p:nvSpPr>
+        <p:spPr>
+          <a:xfrm>
+            <a:off x="548640" y="1143000"/>
+            <a:ext cx="11064240" cy="5029200"/>
+          </a:xfrm>
+          <a:prstGeom prst="rect">
+            <a:avLst/>
+          </a:prstGeom>
+          <a:solidFill>
+            <a:srgbClr val="F4F4F4"/>
+          </a:solidFill>
+        </p:spPr>
+        <p:txBody>
+          <a:bodyPr wrap="square">
+            <a:noAutofit/>
+          </a:bodyPr>
+          <a:lstStyle/>
+          <a:p>
+            <a:pPr>
+              <a:lnSpc>
+                <a:spcPts val="2200"/>
+              </a:lnSpc>
+              <a:spcAft>
+                <a:spcPts val="400"/>
+              </a:spcAft>
+            </a:pPr>
+            <a:r>
+              <a:rPr sz="2000" b="0">
+                <a:solidFill>
+                  <a:srgbClr val="333333"/>
+                </a:solidFill>
+                <a:latin typeface="Consolas"/>
+              </a:rPr>
+              <a:t>INPUT: graph G, method ∈ {random,greedy,grow}</a:t>
+            </a:r>
+          </a:p>
+          <a:p>
+            <a:pPr>
+              <a:lnSpc>
+                <a:spcPts val="2200"/>
+              </a:lnSpc>
+              <a:spcAft>
+                <a:spcPts val="400"/>
+              </a:spcAft>
+            </a:pPr>
+            <a:r>
+              <a:rPr sz="2000" b="0">
+                <a:solidFill>
+                  <a:srgbClr val="333333"/>
+                </a:solidFill>
+                <a:latin typeface="Consolas"/>
+              </a:rPr>
+              <a:t>OUTPUT: legal side[v] ∈ {0,1}</a:t>
+            </a:r>
+          </a:p>
+          <a:p>
+            <a:pPr>
+              <a:lnSpc>
+                <a:spcPts val="2200"/>
+              </a:lnSpc>
+              <a:spcAft>
+                <a:spcPts val="400"/>
+              </a:spcAft>
+            </a:pPr>
+            <a:r>
+              <a:rPr sz="2000" b="0">
+                <a:solidFill>
+                  <a:srgbClr val="333333"/>
+                </a:solidFill>
+                <a:latin typeface="Consolas"/>
+              </a:rPr>
+              <a:t>random(seed): shuffle; split by half</a:t>
+            </a:r>
+          </a:p>
+          <a:p>
+            <a:pPr>
+              <a:lnSpc>
+                <a:spcPts val="2200"/>
+              </a:lnSpc>
+              <a:spcAft>
+                <a:spcPts val="400"/>
+              </a:spcAft>
+            </a:pPr>
+            <a:r>
+              <a:rPr sz="2000" b="0">
+                <a:solidFill>
+                  <a:srgbClr val="333333"/>
+                </a:solidFill>
+                <a:latin typeface="Consolas"/>
+              </a:rPr>
+              <a:t>greedy: keep heaviest edges internal when able</a:t>
+            </a:r>
+          </a:p>
+          <a:p>
+            <a:pPr>
+              <a:lnSpc>
+                <a:spcPts val="2200"/>
+              </a:lnSpc>
+              <a:spcAft>
+                <a:spcPts val="400"/>
+              </a:spcAft>
+            </a:pPr>
+            <a:r>
+              <a:rPr sz="2000" b="0">
+                <a:solidFill>
+                  <a:srgbClr val="333333"/>
+                </a:solidFill>
+                <a:latin typeface="Consolas"/>
+              </a:rPr>
+              <a:t>grow(seed): expand frontier until size budget</a:t>
+            </a:r>
+          </a:p>
+          <a:p>
+            <a:pPr>
+              <a:lnSpc>
+                <a:spcPts val="2200"/>
+              </a:lnSpc>
+              <a:spcAft>
+                <a:spcPts val="400"/>
+              </a:spcAft>
+            </a:pPr>
+            <a:r>
+              <a:rPr sz="2000" b="0">
+                <a:solidFill>
+                  <a:srgbClr val="333333"/>
+                </a:solidFill>
+                <a:latin typeface="Consolas"/>
+              </a:rPr>
+              <a:t>report cutsize + balance for every seed</a:t>
+            </a:r>
+          </a:p>
+          <a:p>
+            <a:pPr>
+              <a:lnSpc>
+                <a:spcPts val="2200"/>
+              </a:lnSpc>
+              <a:spcAft>
+                <a:spcPts val="400"/>
+              </a:spcAft>
+            </a:pPr>
+            <a:r>
+              <a:rPr sz="2000" b="0">
+                <a:solidFill>
+                  <a:srgbClr val="333333"/>
+                </a:solidFill>
+                <a:latin typeface="Consolas"/>
+              </a:rPr>
+              <a:t>GOLDEN: grow(D)→DE|ABC cut=3</a:t>
+            </a:r>
+          </a:p>
+          <a:p>
+            <a:pPr>
+              <a:lnSpc>
+                <a:spcPts val="2200"/>
+              </a:lnSpc>
+              <a:spcAft>
+                <a:spcPts val="400"/>
+              </a:spcAft>
+            </a:pPr>
+            <a:r>
+              <a:rPr sz="2000" b="0">
+                <a:solidFill>
+                  <a:srgbClr val="333333"/>
+                </a:solidFill>
+                <a:latin typeface="Consolas"/>
+              </a:rPr>
+              <a:t>random(7)→AE|BCD cut=12</a:t>
+            </a:r>
+          </a:p>
+        </p:txBody>
+      </p:sp>
+      <p:sp>
+        <p:nvSpPr>
+          <p:cNvPr id="4" name="TextBox 3"/>
+          <p:cNvSpPr txBox="1"/>
+          <p:nvPr/>
+        </p:nvSpPr>
+        <p:spPr>
+          <a:xfrm>
+            <a:off x="548640" y="6355080"/>
+            <a:ext cx="11064240" cy="320040"/>
+          </a:xfrm>
+          <a:prstGeom prst="rect">
+            <a:avLst/>
+          </a:prstGeom>
+          <a:noFill/>
+        </p:spPr>
+        <p:txBody>
+          <a:bodyPr wrap="square">
+            <a:noAutofit/>
+          </a:bodyPr>
+          <a:lstStyle/>
+          <a:p>
+            <a:pPr algn="r">
+              <a:lnSpc>
+                <a:spcPts val="2200"/>
+              </a:lnSpc>
+              <a:defRPr sz="1000" b="0">
+                <a:solidFill>
+                  <a:srgbClr val="666666"/>
+                </a:solidFill>
+                <a:latin typeface="Calibri"/>
+              </a:defRPr>
+            </a:pPr>
+            <a:r>
+              <a:t>learn_partitioning — 03 initial bipartition</a:t>
+            </a:r>
+          </a:p>
+        </p:txBody>
+      </p:sp>
+    </p:spTree>
+  </p:cSld>
+  <p:clrMapOvr>
+    <a:masterClrMapping/>
+  </p:clrMapOvr>
+</p:sld>
+</file>
+
+<file path=ppt/slides/slide6.xml><?xml version="1.0" encoding="utf-8"?>
 <p:sld xmlns:a="http://schemas.openxmlformats.org/drawingml/2006/main" xmlns:p="http://schemas.openxmlformats.org/presentationml/2006/main" xmlns:r="http://schemas.openxmlformats.org/officeDocument/2006/relationships">
   <p:cSld>
     <p:spTree>
@@ -5074,7 +6379,7 @@
 </p:sld>
 </file>
 
-<file path=ppt/slides/slide4.xml><?xml version="1.0" encoding="utf-8"?>
+<file path=ppt/slides/slide7.xml><?xml version="1.0" encoding="utf-8"?>
 <p:sld xmlns:a="http://schemas.openxmlformats.org/drawingml/2006/main" xmlns:p="http://schemas.openxmlformats.org/presentationml/2006/main" xmlns:r="http://schemas.openxmlformats.org/officeDocument/2006/relationships">
   <p:cSld>
     <p:spTree>
@@ -5233,7 +6538,7 @@
 </p:sld>
 </file>
 
-<file path=ppt/slides/slide5.xml><?xml version="1.0" encoding="utf-8"?>
+<file path=ppt/slides/slide8.xml><?xml version="1.0" encoding="utf-8"?>
 <p:sld xmlns:a="http://schemas.openxmlformats.org/drawingml/2006/main" xmlns:p="http://schemas.openxmlformats.org/presentationml/2006/main" xmlns:r="http://schemas.openxmlformats.org/officeDocument/2006/relationships">
   <p:cSld>
     <p:spTree>
@@ -5392,7 +6697,7 @@
 </p:sld>
 </file>
 
-<file path=ppt/slides/slide6.xml><?xml version="1.0" encoding="utf-8"?>
+<file path=ppt/slides/slide9.xml><?xml version="1.0" encoding="utf-8"?>
 <p:sld xmlns:a="http://schemas.openxmlformats.org/drawingml/2006/main" xmlns:p="http://schemas.openxmlformats.org/presentationml/2006/main" xmlns:r="http://schemas.openxmlformats.org/officeDocument/2006/relationships">
   <p:cSld>
     <p:spTree>
@@ -5507,553 +6812,6 @@
       <p:sp>
         <p:nvSpPr>
           <p:cNvPr id="5" name="TextBox 4"/>
-          <p:cNvSpPr txBox="1"/>
-          <p:nvPr/>
-        </p:nvSpPr>
-        <p:spPr>
-          <a:xfrm>
-            <a:off x="548640" y="6355080"/>
-            <a:ext cx="11064240" cy="320040"/>
-          </a:xfrm>
-          <a:prstGeom prst="rect">
-            <a:avLst/>
-          </a:prstGeom>
-          <a:noFill/>
-        </p:spPr>
-        <p:txBody>
-          <a:bodyPr wrap="square">
-            <a:noAutofit/>
-          </a:bodyPr>
-          <a:lstStyle/>
-          <a:p>
-            <a:pPr algn="r">
-              <a:lnSpc>
-                <a:spcPts val="2200"/>
-              </a:lnSpc>
-              <a:defRPr sz="1000" b="0">
-                <a:solidFill>
-                  <a:srgbClr val="666666"/>
-                </a:solidFill>
-                <a:latin typeface="Calibri"/>
-              </a:defRPr>
-            </a:pPr>
-            <a:r>
-              <a:t>learn_partitioning — 03 initial bipartition</a:t>
-            </a:r>
-          </a:p>
-        </p:txBody>
-      </p:sp>
-    </p:spTree>
-  </p:cSld>
-  <p:clrMapOvr>
-    <a:masterClrMapping/>
-  </p:clrMapOvr>
-</p:sld>
-</file>
-
-<file path=ppt/slides/slide7.xml><?xml version="1.0" encoding="utf-8"?>
-<p:sld xmlns:a="http://schemas.openxmlformats.org/drawingml/2006/main" xmlns:p="http://schemas.openxmlformats.org/presentationml/2006/main" xmlns:r="http://schemas.openxmlformats.org/officeDocument/2006/relationships">
-  <p:cSld>
-    <p:spTree>
-      <p:nvGrpSpPr>
-        <p:cNvPr id="1" name=""/>
-        <p:cNvGrpSpPr/>
-        <p:nvPr/>
-      </p:nvGrpSpPr>
-      <p:grpSpPr/>
-      <p:sp>
-        <p:nvSpPr>
-          <p:cNvPr id="2" name="TextBox 1"/>
-          <p:cNvSpPr txBox="1"/>
-          <p:nvPr/>
-        </p:nvSpPr>
-        <p:spPr>
-          <a:xfrm>
-            <a:off x="548640" y="411480"/>
-            <a:ext cx="11064240" cy="777240"/>
-          </a:xfrm>
-          <a:prstGeom prst="rect">
-            <a:avLst/>
-          </a:prstGeom>
-          <a:noFill/>
-        </p:spPr>
-        <p:txBody>
-          <a:bodyPr wrap="square">
-            <a:noAutofit/>
-          </a:bodyPr>
-          <a:lstStyle/>
-          <a:p>
-            <a:pPr>
-              <a:lnSpc>
-                <a:spcPts val="2200"/>
-              </a:lnSpc>
-            </a:pPr>
-            <a:r>
-              <a:rPr sz="2800" b="1">
-                <a:solidFill>
-                  <a:srgbClr val="1A1A2E"/>
-                </a:solidFill>
-                <a:latin typeface="Calibri"/>
-              </a:rPr>
-              <a:t>Seed quality sets the ceiling</a:t>
-            </a:r>
-          </a:p>
-        </p:txBody>
-      </p:sp>
-      <p:pic>
-        <p:nvPicPr>
-          <p:cNvPr id="3" name="Picture 2" descr="05-takeaway.png"/>
-          <p:cNvPicPr>
-            <a:picLocks noChangeAspect="1"/>
-          </p:cNvPicPr>
-          <p:nvPr/>
-        </p:nvPicPr>
-        <p:blipFill>
-          <a:blip r:embed="rId2"/>
-          <a:stretch>
-            <a:fillRect/>
-          </a:stretch>
-        </p:blipFill>
-        <p:spPr>
-          <a:xfrm>
-            <a:off x="548640" y="1143000"/>
-            <a:ext cx="9404113" cy="4572000"/>
-          </a:xfrm>
-          <a:prstGeom prst="rect">
-            <a:avLst/>
-          </a:prstGeom>
-        </p:spPr>
-      </p:pic>
-      <p:sp>
-        <p:nvSpPr>
-          <p:cNvPr id="4" name="TextBox 3"/>
-          <p:cNvSpPr txBox="1"/>
-          <p:nvPr/>
-        </p:nvSpPr>
-        <p:spPr>
-          <a:xfrm>
-            <a:off x="548640" y="5897880"/>
-            <a:ext cx="11064240" cy="411480"/>
-          </a:xfrm>
-          <a:prstGeom prst="rect">
-            <a:avLst/>
-          </a:prstGeom>
-          <a:noFill/>
-        </p:spPr>
-        <p:txBody>
-          <a:bodyPr wrap="square">
-            <a:noAutofit/>
-          </a:bodyPr>
-          <a:lstStyle/>
-          <a:p>
-            <a:pPr>
-              <a:lnSpc>
-                <a:spcPts val="2200"/>
-              </a:lnSpc>
-            </a:pPr>
-            <a:r>
-              <a:rPr sz="1200" b="0">
-                <a:solidFill>
-                  <a:srgbClr val="333333"/>
-                </a:solidFill>
-                <a:latin typeface="Calibri"/>
-              </a:rPr>
-              <a:t>Seed quality sets the ceiling</a:t>
-            </a:r>
-          </a:p>
-        </p:txBody>
-      </p:sp>
-      <p:sp>
-        <p:nvSpPr>
-          <p:cNvPr id="5" name="TextBox 4"/>
-          <p:cNvSpPr txBox="1"/>
-          <p:nvPr/>
-        </p:nvSpPr>
-        <p:spPr>
-          <a:xfrm>
-            <a:off x="548640" y="6355080"/>
-            <a:ext cx="11064240" cy="320040"/>
-          </a:xfrm>
-          <a:prstGeom prst="rect">
-            <a:avLst/>
-          </a:prstGeom>
-          <a:noFill/>
-        </p:spPr>
-        <p:txBody>
-          <a:bodyPr wrap="square">
-            <a:noAutofit/>
-          </a:bodyPr>
-          <a:lstStyle/>
-          <a:p>
-            <a:pPr algn="r">
-              <a:lnSpc>
-                <a:spcPts val="2200"/>
-              </a:lnSpc>
-              <a:defRPr sz="1000" b="0">
-                <a:solidFill>
-                  <a:srgbClr val="666666"/>
-                </a:solidFill>
-                <a:latin typeface="Calibri"/>
-              </a:defRPr>
-            </a:pPr>
-            <a:r>
-              <a:t>learn_partitioning — 03 initial bipartition</a:t>
-            </a:r>
-          </a:p>
-        </p:txBody>
-      </p:sp>
-    </p:spTree>
-  </p:cSld>
-  <p:clrMapOvr>
-    <a:masterClrMapping/>
-  </p:clrMapOvr>
-</p:sld>
-</file>
-
-<file path=ppt/slides/slide8.xml><?xml version="1.0" encoding="utf-8"?>
-<p:sld xmlns:a="http://schemas.openxmlformats.org/drawingml/2006/main" xmlns:p="http://schemas.openxmlformats.org/presentationml/2006/main" xmlns:r="http://schemas.openxmlformats.org/officeDocument/2006/relationships">
-  <p:cSld>
-    <p:spTree>
-      <p:nvGrpSpPr>
-        <p:cNvPr id="1" name=""/>
-        <p:cNvGrpSpPr/>
-        <p:nvPr/>
-      </p:nvGrpSpPr>
-      <p:grpSpPr/>
-      <p:sp>
-        <p:nvSpPr>
-          <p:cNvPr id="2" name="TextBox 1"/>
-          <p:cNvSpPr txBox="1"/>
-          <p:nvPr/>
-        </p:nvSpPr>
-        <p:spPr>
-          <a:xfrm>
-            <a:off x="548640" y="411480"/>
-            <a:ext cx="11064240" cy="777240"/>
-          </a:xfrm>
-          <a:prstGeom prst="rect">
-            <a:avLst/>
-          </a:prstGeom>
-          <a:noFill/>
-        </p:spPr>
-        <p:txBody>
-          <a:bodyPr wrap="square">
-            <a:noAutofit/>
-          </a:bodyPr>
-          <a:lstStyle/>
-          <a:p>
-            <a:pPr>
-              <a:lnSpc>
-                <a:spcPts val="2200"/>
-              </a:lnSpc>
-            </a:pPr>
-            <a:r>
-              <a:rPr sz="2800" b="1">
-                <a:solidFill>
-                  <a:srgbClr val="1A1A2E"/>
-                </a:solidFill>
-                <a:latin typeface="Calibri"/>
-              </a:rPr>
-              <a:t>Browser lab track</a:t>
-            </a:r>
-          </a:p>
-        </p:txBody>
-      </p:sp>
-      <p:sp>
-        <p:nvSpPr>
-          <p:cNvPr id="3" name="TextBox 2"/>
-          <p:cNvSpPr txBox="1"/>
-          <p:nvPr/>
-        </p:nvSpPr>
-        <p:spPr>
-          <a:xfrm>
-            <a:off x="548640" y="1234440"/>
-            <a:ext cx="11064240" cy="4937760"/>
-          </a:xfrm>
-          <a:prstGeom prst="rect">
-            <a:avLst/>
-          </a:prstGeom>
-          <a:noFill/>
-        </p:spPr>
-        <p:txBody>
-          <a:bodyPr wrap="square">
-            <a:noAutofit/>
-          </a:bodyPr>
-          <a:lstStyle/>
-          <a:p>
-            <a:pPr lvl="0" marL="457200" indent="-228600">
-              <a:buFont typeface="Calibri"/>
-              <a:spcAft>
-                <a:spcPts val="1000"/>
-              </a:spcAft>
-              <a:buSzPct val="100000"/>
-              <a:buChar char="•"/>
-              <a:lnSpc>
-                <a:spcPts val="2200"/>
-              </a:lnSpc>
-            </a:pPr>
-            <a:r>
-              <a:rPr sz="2000" b="0">
-                <a:solidFill>
-                  <a:srgbClr val="333333"/>
-                </a:solidFill>
-                <a:latin typeface="Calibri"/>
-              </a:rPr>
-              <a:t>In the browser lab track, open the </a:t>
-            </a:r>
-            <a:r>
-              <a:rPr sz="2000" b="1">
-                <a:solidFill>
-                  <a:srgbClr val="333333"/>
-                </a:solidFill>
-                <a:latin typeface="Calibri"/>
-              </a:rPr>
-              <a:t>initial-bipartition</a:t>
-            </a:r>
-            <a:r>
-              <a:rPr sz="2000" b="0">
-                <a:solidFill>
-                  <a:srgbClr val="333333"/>
-                </a:solidFill>
-                <a:latin typeface="Calibri"/>
-              </a:rPr>
-              <a:t> lab from the tools shelf</a:t>
-            </a:r>
-          </a:p>
-          <a:p>
-            <a:pPr lvl="0" marL="457200" indent="-228600">
-              <a:buFont typeface="Calibri"/>
-              <a:spcAft>
-                <a:spcPts val="1000"/>
-              </a:spcAft>
-              <a:buSzPct val="100000"/>
-              <a:buChar char="•"/>
-              <a:lnSpc>
-                <a:spcPts val="2200"/>
-              </a:lnSpc>
-            </a:pPr>
-            <a:r>
-              <a:rPr sz="2000" b="0">
-                <a:solidFill>
-                  <a:srgbClr val="333333"/>
-                </a:solidFill>
-                <a:latin typeface="Calibri"/>
-              </a:rPr>
-              <a:t>Load the starter graph, run the algorithm once</a:t>
-            </a:r>
-          </a:p>
-          <a:p>
-            <a:pPr lvl="0" marL="457200" indent="-228600">
-              <a:buFont typeface="Calibri"/>
-              <a:spcAft>
-                <a:spcPts val="1000"/>
-              </a:spcAft>
-              <a:buSzPct val="100000"/>
-              <a:buChar char="•"/>
-              <a:lnSpc>
-                <a:spcPts val="2200"/>
-              </a:lnSpc>
-            </a:pPr>
-            <a:r>
-              <a:rPr sz="2000" b="0">
-                <a:solidFill>
-                  <a:srgbClr val="333333"/>
-                </a:solidFill>
-                <a:latin typeface="Calibri"/>
-              </a:rPr>
-              <a:t>Work the challenges that lock the goldens</a:t>
-            </a:r>
-          </a:p>
-        </p:txBody>
-      </p:sp>
-      <p:sp>
-        <p:nvSpPr>
-          <p:cNvPr id="4" name="TextBox 3"/>
-          <p:cNvSpPr txBox="1"/>
-          <p:nvPr/>
-        </p:nvSpPr>
-        <p:spPr>
-          <a:xfrm>
-            <a:off x="548640" y="6355080"/>
-            <a:ext cx="11064240" cy="320040"/>
-          </a:xfrm>
-          <a:prstGeom prst="rect">
-            <a:avLst/>
-          </a:prstGeom>
-          <a:noFill/>
-        </p:spPr>
-        <p:txBody>
-          <a:bodyPr wrap="square">
-            <a:noAutofit/>
-          </a:bodyPr>
-          <a:lstStyle/>
-          <a:p>
-            <a:pPr algn="r">
-              <a:lnSpc>
-                <a:spcPts val="2200"/>
-              </a:lnSpc>
-              <a:defRPr sz="1000" b="0">
-                <a:solidFill>
-                  <a:srgbClr val="666666"/>
-                </a:solidFill>
-                <a:latin typeface="Calibri"/>
-              </a:defRPr>
-            </a:pPr>
-            <a:r>
-              <a:t>learn_partitioning — 03 initial bipartition</a:t>
-            </a:r>
-          </a:p>
-        </p:txBody>
-      </p:sp>
-    </p:spTree>
-  </p:cSld>
-  <p:clrMapOvr>
-    <a:masterClrMapping/>
-  </p:clrMapOvr>
-</p:sld>
-</file>
-
-<file path=ppt/slides/slide9.xml><?xml version="1.0" encoding="utf-8"?>
-<p:sld xmlns:a="http://schemas.openxmlformats.org/drawingml/2006/main" xmlns:p="http://schemas.openxmlformats.org/presentationml/2006/main" xmlns:r="http://schemas.openxmlformats.org/officeDocument/2006/relationships">
-  <p:cSld>
-    <p:spTree>
-      <p:nvGrpSpPr>
-        <p:cNvPr id="1" name=""/>
-        <p:cNvGrpSpPr/>
-        <p:nvPr/>
-      </p:nvGrpSpPr>
-      <p:grpSpPr/>
-      <p:sp>
-        <p:nvSpPr>
-          <p:cNvPr id="2" name="TextBox 1"/>
-          <p:cNvSpPr txBox="1"/>
-          <p:nvPr/>
-        </p:nvSpPr>
-        <p:spPr>
-          <a:xfrm>
-            <a:off x="548640" y="411480"/>
-            <a:ext cx="11064240" cy="777240"/>
-          </a:xfrm>
-          <a:prstGeom prst="rect">
-            <a:avLst/>
-          </a:prstGeom>
-          <a:noFill/>
-        </p:spPr>
-        <p:txBody>
-          <a:bodyPr wrap="square">
-            <a:noAutofit/>
-          </a:bodyPr>
-          <a:lstStyle/>
-          <a:p>
-            <a:pPr>
-              <a:lnSpc>
-                <a:spcPts val="2200"/>
-              </a:lnSpc>
-            </a:pPr>
-            <a:r>
-              <a:rPr sz="2800" b="1">
-                <a:solidFill>
-                  <a:srgbClr val="1A1A2E"/>
-                </a:solidFill>
-                <a:latin typeface="Calibri"/>
-              </a:rPr>
-              <a:t>Implement track</a:t>
-            </a:r>
-          </a:p>
-        </p:txBody>
-      </p:sp>
-      <p:sp>
-        <p:nvSpPr>
-          <p:cNvPr id="3" name="TextBox 2"/>
-          <p:cNvSpPr txBox="1"/>
-          <p:nvPr/>
-        </p:nvSpPr>
-        <p:spPr>
-          <a:xfrm>
-            <a:off x="548640" y="1234440"/>
-            <a:ext cx="11064240" cy="4937760"/>
-          </a:xfrm>
-          <a:prstGeom prst="rect">
-            <a:avLst/>
-          </a:prstGeom>
-          <a:noFill/>
-        </p:spPr>
-        <p:txBody>
-          <a:bodyPr wrap="square">
-            <a:noAutofit/>
-          </a:bodyPr>
-          <a:lstStyle/>
-          <a:p>
-            <a:pPr lvl="0" marL="457200" indent="-228600">
-              <a:buFont typeface="Calibri"/>
-              <a:spcAft>
-                <a:spcPts val="1000"/>
-              </a:spcAft>
-              <a:buSzPct val="100000"/>
-              <a:buChar char="•"/>
-              <a:lnSpc>
-                <a:spcPts val="2200"/>
-              </a:lnSpc>
-            </a:pPr>
-            <a:r>
-              <a:rPr sz="2000" b="0">
-                <a:solidFill>
-                  <a:srgbClr val="333333"/>
-                </a:solidFill>
-                <a:latin typeface="Calibri"/>
-              </a:rPr>
-              <a:t>In the implement track, open this module’s examples and the course `common/` solvers</a:t>
-            </a:r>
-          </a:p>
-          <a:p>
-            <a:pPr lvl="0" marL="457200" indent="-228600">
-              <a:buFont typeface="Calibri"/>
-              <a:spcAft>
-                <a:spcPts val="1000"/>
-              </a:spcAft>
-              <a:buSzPct val="100000"/>
-              <a:buChar char="•"/>
-              <a:lnSpc>
-                <a:spcPts val="2200"/>
-              </a:lnSpc>
-            </a:pPr>
-            <a:r>
-              <a:rPr sz="2000" b="0">
-                <a:solidFill>
-                  <a:srgbClr val="333333"/>
-                </a:solidFill>
-                <a:latin typeface="Calibri"/>
-              </a:rPr>
-              <a:t>Parse the tiny graph, run the algorithm with a deterministic seed</a:t>
-            </a:r>
-          </a:p>
-          <a:p>
-            <a:pPr lvl="0" marL="457200" indent="-228600">
-              <a:buFont typeface="Calibri"/>
-              <a:spcAft>
-                <a:spcPts val="1000"/>
-              </a:spcAft>
-              <a:buSzPct val="100000"/>
-              <a:buChar char="•"/>
-              <a:lnSpc>
-                <a:spcPts val="2200"/>
-              </a:lnSpc>
-            </a:pPr>
-            <a:r>
-              <a:rPr sz="2000" b="0">
-                <a:solidFill>
-                  <a:srgbClr val="333333"/>
-                </a:solidFill>
-                <a:latin typeface="Calibri"/>
-              </a:rPr>
-              <a:t>Match the browser goldens before you claim the checklist</a:t>
-            </a:r>
-          </a:p>
-        </p:txBody>
-      </p:sp>
-      <p:sp>
-        <p:nvSpPr>
-          <p:cNvPr id="4" name="TextBox 3"/>
           <p:cNvSpPr txBox="1"/>
           <p:nvPr/>
         </p:nvSpPr>
